--- a/QuantEdge.pptx
+++ b/QuantEdge.pptx
@@ -1,13 +1,13 @@
 
 <file path=ppt/presentation.xml><?xml version="1.0" encoding="utf-8"?>
-<p:presentation xmlns:a="http://schemas.openxmlformats.org/drawingml/2006/main" xmlns:r="http://schemas.openxmlformats.org/officeDocument/2006/relationships" xmlns:p="http://schemas.openxmlformats.org/presentationml/2006/main" saveSubsetFonts="1" embedTrueTypeFonts="true">
+<p:presentation xmlns:a="http://schemas.openxmlformats.org/drawingml/2006/main" xmlns:r="http://schemas.openxmlformats.org/officeDocument/2006/relationships" xmlns:p="http://schemas.openxmlformats.org/presentationml/2006/main" embedTrueTypeFonts="1" saveSubsetFonts="1">
   <p:sldMasterIdLst>
     <p:sldMasterId id="2147483648" r:id="rId1"/>
   </p:sldMasterIdLst>
   <p:sldIdLst>
-    <p:sldId id="256" r:id="rId6"/>
-    <p:sldId id="257" r:id="rId7"/>
-    <p:sldId id="258" r:id="rId8"/>
+    <p:sldId id="256" r:id="rId2"/>
+    <p:sldId id="257" r:id="rId3"/>
+    <p:sldId id="258" r:id="rId4"/>
   </p:sldIdLst>
   <p:sldSz cx="18288000" cy="10287000"/>
   <p:notesSz cx="6858000" cy="9144000"/>
@@ -106,6 +106,22 @@
       </a:defRPr>
     </a:lvl9pPr>
   </p:defaultTextStyle>
+  <p:extLst>
+    <p:ext uri="{EFAFB233-063F-42B5-8137-9DF3F51BA10A}">
+      <p15:sldGuideLst xmlns:p15="http://schemas.microsoft.com/office/powerpoint/2012/main">
+        <p15:guide id="1" orient="horz" pos="2160">
+          <p15:clr>
+            <a:srgbClr val="A4A3A4"/>
+          </p15:clr>
+        </p15:guide>
+        <p15:guide id="2" pos="2880">
+          <p15:clr>
+            <a:srgbClr val="A4A3A4"/>
+          </p15:clr>
+        </p15:guide>
+      </p15:sldGuideLst>
+    </p:ext>
+  </p:extLst>
 </p:presentation>
 </file>
 
@@ -147,10 +163,9 @@
           <a:lstStyle/>
           <a:p>
             <a:r>
-              <a:rPr lang="en-US" smtClean="0"/>
+              <a:rPr lang="en-US"/>
               <a:t>Click to edit Master title style</a:t>
             </a:r>
-            <a:endParaRPr lang="en-US"/>
           </a:p>
         </p:txBody>
       </p:sp>
@@ -266,10 +281,9 @@
           </a:lstStyle>
           <a:p>
             <a:r>
-              <a:rPr lang="en-US" smtClean="0"/>
+              <a:rPr lang="en-US"/>
               <a:t>Click to edit Master subtitle style</a:t>
             </a:r>
-            <a:endParaRPr lang="en-US"/>
           </a:p>
         </p:txBody>
       </p:sp>
@@ -291,7 +305,7 @@
             <a:fld id="{1D8BD707-D9CF-40AE-B4C6-C98DA3205C09}" type="datetimeFigureOut">
               <a:rPr lang="en-US" smtClean="0"/>
               <a:pPr/>
-              <a:t>8/1/2011</a:t>
+              <a:t>4/10/2026</a:t>
             </a:fld>
             <a:endParaRPr lang="en-US"/>
           </a:p>
@@ -381,10 +395,9 @@
           <a:lstStyle/>
           <a:p>
             <a:r>
-              <a:rPr lang="en-US" smtClean="0"/>
+              <a:rPr lang="en-US"/>
               <a:t>Click to edit Master title style</a:t>
             </a:r>
-            <a:endParaRPr lang="en-US"/>
           </a:p>
         </p:txBody>
       </p:sp>
@@ -405,38 +418,37 @@
           <a:p>
             <a:pPr lvl="0"/>
             <a:r>
-              <a:rPr lang="en-US" smtClean="0"/>
+              <a:rPr lang="en-US"/>
               <a:t>Click to edit Master text styles</a:t>
             </a:r>
           </a:p>
           <a:p>
             <a:pPr lvl="1"/>
             <a:r>
-              <a:rPr lang="en-US" smtClean="0"/>
+              <a:rPr lang="en-US"/>
               <a:t>Second level</a:t>
             </a:r>
           </a:p>
           <a:p>
             <a:pPr lvl="2"/>
             <a:r>
-              <a:rPr lang="en-US" smtClean="0"/>
+              <a:rPr lang="en-US"/>
               <a:t>Third level</a:t>
             </a:r>
           </a:p>
           <a:p>
             <a:pPr lvl="3"/>
             <a:r>
-              <a:rPr lang="en-US" smtClean="0"/>
+              <a:rPr lang="en-US"/>
               <a:t>Fourth level</a:t>
             </a:r>
           </a:p>
           <a:p>
             <a:pPr lvl="4"/>
             <a:r>
-              <a:rPr lang="en-US" smtClean="0"/>
+              <a:rPr lang="en-US"/>
               <a:t>Fifth level</a:t>
             </a:r>
-            <a:endParaRPr lang="en-US"/>
           </a:p>
         </p:txBody>
       </p:sp>
@@ -458,7 +470,7 @@
             <a:fld id="{1D8BD707-D9CF-40AE-B4C6-C98DA3205C09}" type="datetimeFigureOut">
               <a:rPr lang="en-US" smtClean="0"/>
               <a:pPr/>
-              <a:t>8/1/2011</a:t>
+              <a:t>4/10/2026</a:t>
             </a:fld>
             <a:endParaRPr lang="en-US"/>
           </a:p>
@@ -553,10 +565,9 @@
           <a:lstStyle/>
           <a:p>
             <a:r>
-              <a:rPr lang="en-US" smtClean="0"/>
+              <a:rPr lang="en-US"/>
               <a:t>Click to edit Master title style</a:t>
             </a:r>
-            <a:endParaRPr lang="en-US"/>
           </a:p>
         </p:txBody>
       </p:sp>
@@ -582,38 +593,37 @@
           <a:p>
             <a:pPr lvl="0"/>
             <a:r>
-              <a:rPr lang="en-US" smtClean="0"/>
+              <a:rPr lang="en-US"/>
               <a:t>Click to edit Master text styles</a:t>
             </a:r>
           </a:p>
           <a:p>
             <a:pPr lvl="1"/>
             <a:r>
-              <a:rPr lang="en-US" smtClean="0"/>
+              <a:rPr lang="en-US"/>
               <a:t>Second level</a:t>
             </a:r>
           </a:p>
           <a:p>
             <a:pPr lvl="2"/>
             <a:r>
-              <a:rPr lang="en-US" smtClean="0"/>
+              <a:rPr lang="en-US"/>
               <a:t>Third level</a:t>
             </a:r>
           </a:p>
           <a:p>
             <a:pPr lvl="3"/>
             <a:r>
-              <a:rPr lang="en-US" smtClean="0"/>
+              <a:rPr lang="en-US"/>
               <a:t>Fourth level</a:t>
             </a:r>
           </a:p>
           <a:p>
             <a:pPr lvl="4"/>
             <a:r>
-              <a:rPr lang="en-US" smtClean="0"/>
+              <a:rPr lang="en-US"/>
               <a:t>Fifth level</a:t>
             </a:r>
-            <a:endParaRPr lang="en-US"/>
           </a:p>
         </p:txBody>
       </p:sp>
@@ -635,7 +645,7 @@
             <a:fld id="{1D8BD707-D9CF-40AE-B4C6-C98DA3205C09}" type="datetimeFigureOut">
               <a:rPr lang="en-US" smtClean="0"/>
               <a:pPr/>
-              <a:t>8/1/2011</a:t>
+              <a:t>4/10/2026</a:t>
             </a:fld>
             <a:endParaRPr lang="en-US"/>
           </a:p>
@@ -725,10 +735,9 @@
           <a:lstStyle/>
           <a:p>
             <a:r>
-              <a:rPr lang="en-US" smtClean="0"/>
+              <a:rPr lang="en-US"/>
               <a:t>Click to edit Master title style</a:t>
             </a:r>
-            <a:endParaRPr lang="en-US"/>
           </a:p>
         </p:txBody>
       </p:sp>
@@ -749,38 +758,37 @@
           <a:p>
             <a:pPr lvl="0"/>
             <a:r>
-              <a:rPr lang="en-US" smtClean="0"/>
+              <a:rPr lang="en-US"/>
               <a:t>Click to edit Master text styles</a:t>
             </a:r>
           </a:p>
           <a:p>
             <a:pPr lvl="1"/>
             <a:r>
-              <a:rPr lang="en-US" smtClean="0"/>
+              <a:rPr lang="en-US"/>
               <a:t>Second level</a:t>
             </a:r>
           </a:p>
           <a:p>
             <a:pPr lvl="2"/>
             <a:r>
-              <a:rPr lang="en-US" smtClean="0"/>
+              <a:rPr lang="en-US"/>
               <a:t>Third level</a:t>
             </a:r>
           </a:p>
           <a:p>
             <a:pPr lvl="3"/>
             <a:r>
-              <a:rPr lang="en-US" smtClean="0"/>
+              <a:rPr lang="en-US"/>
               <a:t>Fourth level</a:t>
             </a:r>
           </a:p>
           <a:p>
             <a:pPr lvl="4"/>
             <a:r>
-              <a:rPr lang="en-US" smtClean="0"/>
+              <a:rPr lang="en-US"/>
               <a:t>Fifth level</a:t>
             </a:r>
-            <a:endParaRPr lang="en-US"/>
           </a:p>
         </p:txBody>
       </p:sp>
@@ -802,7 +810,7 @@
             <a:fld id="{1D8BD707-D9CF-40AE-B4C6-C98DA3205C09}" type="datetimeFigureOut">
               <a:rPr lang="en-US" smtClean="0"/>
               <a:pPr/>
-              <a:t>8/1/2011</a:t>
+              <a:t>4/10/2026</a:t>
             </a:fld>
             <a:endParaRPr lang="en-US"/>
           </a:p>
@@ -901,10 +909,9 @@
           </a:lstStyle>
           <a:p>
             <a:r>
-              <a:rPr lang="en-US" smtClean="0"/>
+              <a:rPr lang="en-US"/>
               <a:t>Click to edit Master title style</a:t>
             </a:r>
-            <a:endParaRPr lang="en-US"/>
           </a:p>
         </p:txBody>
       </p:sp>
@@ -1021,7 +1028,7 @@
           <a:p>
             <a:pPr lvl="0"/>
             <a:r>
-              <a:rPr lang="en-US" smtClean="0"/>
+              <a:rPr lang="en-US"/>
               <a:t>Click to edit Master text styles</a:t>
             </a:r>
           </a:p>
@@ -1045,7 +1052,7 @@
             <a:fld id="{1D8BD707-D9CF-40AE-B4C6-C98DA3205C09}" type="datetimeFigureOut">
               <a:rPr lang="en-US" smtClean="0"/>
               <a:pPr/>
-              <a:t>8/1/2011</a:t>
+              <a:t>4/10/2026</a:t>
             </a:fld>
             <a:endParaRPr lang="en-US"/>
           </a:p>
@@ -1135,10 +1142,9 @@
           <a:lstStyle/>
           <a:p>
             <a:r>
-              <a:rPr lang="en-US" smtClean="0"/>
+              <a:rPr lang="en-US"/>
               <a:t>Click to edit Master title style</a:t>
             </a:r>
-            <a:endParaRPr lang="en-US"/>
           </a:p>
         </p:txBody>
       </p:sp>
@@ -1192,38 +1198,37 @@
           <a:p>
             <a:pPr lvl="0"/>
             <a:r>
-              <a:rPr lang="en-US" smtClean="0"/>
+              <a:rPr lang="en-US"/>
               <a:t>Click to edit Master text styles</a:t>
             </a:r>
           </a:p>
           <a:p>
             <a:pPr lvl="1"/>
             <a:r>
-              <a:rPr lang="en-US" smtClean="0"/>
+              <a:rPr lang="en-US"/>
               <a:t>Second level</a:t>
             </a:r>
           </a:p>
           <a:p>
             <a:pPr lvl="2"/>
             <a:r>
-              <a:rPr lang="en-US" smtClean="0"/>
+              <a:rPr lang="en-US"/>
               <a:t>Third level</a:t>
             </a:r>
           </a:p>
           <a:p>
             <a:pPr lvl="3"/>
             <a:r>
-              <a:rPr lang="en-US" smtClean="0"/>
+              <a:rPr lang="en-US"/>
               <a:t>Fourth level</a:t>
             </a:r>
           </a:p>
           <a:p>
             <a:pPr lvl="4"/>
             <a:r>
-              <a:rPr lang="en-US" smtClean="0"/>
+              <a:rPr lang="en-US"/>
               <a:t>Fifth level</a:t>
             </a:r>
-            <a:endParaRPr lang="en-US"/>
           </a:p>
         </p:txBody>
       </p:sp>
@@ -1277,38 +1282,37 @@
           <a:p>
             <a:pPr lvl="0"/>
             <a:r>
-              <a:rPr lang="en-US" smtClean="0"/>
+              <a:rPr lang="en-US"/>
               <a:t>Click to edit Master text styles</a:t>
             </a:r>
           </a:p>
           <a:p>
             <a:pPr lvl="1"/>
             <a:r>
-              <a:rPr lang="en-US" smtClean="0"/>
+              <a:rPr lang="en-US"/>
               <a:t>Second level</a:t>
             </a:r>
           </a:p>
           <a:p>
             <a:pPr lvl="2"/>
             <a:r>
-              <a:rPr lang="en-US" smtClean="0"/>
+              <a:rPr lang="en-US"/>
               <a:t>Third level</a:t>
             </a:r>
           </a:p>
           <a:p>
             <a:pPr lvl="3"/>
             <a:r>
-              <a:rPr lang="en-US" smtClean="0"/>
+              <a:rPr lang="en-US"/>
               <a:t>Fourth level</a:t>
             </a:r>
           </a:p>
           <a:p>
             <a:pPr lvl="4"/>
             <a:r>
-              <a:rPr lang="en-US" smtClean="0"/>
+              <a:rPr lang="en-US"/>
               <a:t>Fifth level</a:t>
             </a:r>
-            <a:endParaRPr lang="en-US"/>
           </a:p>
         </p:txBody>
       </p:sp>
@@ -1330,7 +1334,7 @@
             <a:fld id="{1D8BD707-D9CF-40AE-B4C6-C98DA3205C09}" type="datetimeFigureOut">
               <a:rPr lang="en-US" smtClean="0"/>
               <a:pPr/>
-              <a:t>8/1/2011</a:t>
+              <a:t>4/10/2026</a:t>
             </a:fld>
             <a:endParaRPr lang="en-US"/>
           </a:p>
@@ -1424,10 +1428,9 @@
           </a:lstStyle>
           <a:p>
             <a:r>
-              <a:rPr lang="en-US" smtClean="0"/>
+              <a:rPr lang="en-US"/>
               <a:t>Click to edit Master title style</a:t>
             </a:r>
-            <a:endParaRPr lang="en-US"/>
           </a:p>
         </p:txBody>
       </p:sp>
@@ -1490,7 +1493,7 @@
           <a:p>
             <a:pPr lvl="0"/>
             <a:r>
-              <a:rPr lang="en-US" smtClean="0"/>
+              <a:rPr lang="en-US"/>
               <a:t>Click to edit Master text styles</a:t>
             </a:r>
           </a:p>
@@ -1546,38 +1549,37 @@
           <a:p>
             <a:pPr lvl="0"/>
             <a:r>
-              <a:rPr lang="en-US" smtClean="0"/>
+              <a:rPr lang="en-US"/>
               <a:t>Click to edit Master text styles</a:t>
             </a:r>
           </a:p>
           <a:p>
             <a:pPr lvl="1"/>
             <a:r>
-              <a:rPr lang="en-US" smtClean="0"/>
+              <a:rPr lang="en-US"/>
               <a:t>Second level</a:t>
             </a:r>
           </a:p>
           <a:p>
             <a:pPr lvl="2"/>
             <a:r>
-              <a:rPr lang="en-US" smtClean="0"/>
+              <a:rPr lang="en-US"/>
               <a:t>Third level</a:t>
             </a:r>
           </a:p>
           <a:p>
             <a:pPr lvl="3"/>
             <a:r>
-              <a:rPr lang="en-US" smtClean="0"/>
+              <a:rPr lang="en-US"/>
               <a:t>Fourth level</a:t>
             </a:r>
           </a:p>
           <a:p>
             <a:pPr lvl="4"/>
             <a:r>
-              <a:rPr lang="en-US" smtClean="0"/>
+              <a:rPr lang="en-US"/>
               <a:t>Fifth level</a:t>
             </a:r>
-            <a:endParaRPr lang="en-US"/>
           </a:p>
         </p:txBody>
       </p:sp>
@@ -1640,7 +1642,7 @@
           <a:p>
             <a:pPr lvl="0"/>
             <a:r>
-              <a:rPr lang="en-US" smtClean="0"/>
+              <a:rPr lang="en-US"/>
               <a:t>Click to edit Master text styles</a:t>
             </a:r>
           </a:p>
@@ -1696,38 +1698,37 @@
           <a:p>
             <a:pPr lvl="0"/>
             <a:r>
-              <a:rPr lang="en-US" smtClean="0"/>
+              <a:rPr lang="en-US"/>
               <a:t>Click to edit Master text styles</a:t>
             </a:r>
           </a:p>
           <a:p>
             <a:pPr lvl="1"/>
             <a:r>
-              <a:rPr lang="en-US" smtClean="0"/>
+              <a:rPr lang="en-US"/>
               <a:t>Second level</a:t>
             </a:r>
           </a:p>
           <a:p>
             <a:pPr lvl="2"/>
             <a:r>
-              <a:rPr lang="en-US" smtClean="0"/>
+              <a:rPr lang="en-US"/>
               <a:t>Third level</a:t>
             </a:r>
           </a:p>
           <a:p>
             <a:pPr lvl="3"/>
             <a:r>
-              <a:rPr lang="en-US" smtClean="0"/>
+              <a:rPr lang="en-US"/>
               <a:t>Fourth level</a:t>
             </a:r>
           </a:p>
           <a:p>
             <a:pPr lvl="4"/>
             <a:r>
-              <a:rPr lang="en-US" smtClean="0"/>
+              <a:rPr lang="en-US"/>
               <a:t>Fifth level</a:t>
             </a:r>
-            <a:endParaRPr lang="en-US"/>
           </a:p>
         </p:txBody>
       </p:sp>
@@ -1749,7 +1750,7 @@
             <a:fld id="{1D8BD707-D9CF-40AE-B4C6-C98DA3205C09}" type="datetimeFigureOut">
               <a:rPr lang="en-US" smtClean="0"/>
               <a:pPr/>
-              <a:t>8/1/2011</a:t>
+              <a:t>4/10/2026</a:t>
             </a:fld>
             <a:endParaRPr lang="en-US"/>
           </a:p>
@@ -1839,10 +1840,9 @@
           <a:lstStyle/>
           <a:p>
             <a:r>
-              <a:rPr lang="en-US" smtClean="0"/>
+              <a:rPr lang="en-US"/>
               <a:t>Click to edit Master title style</a:t>
             </a:r>
-            <a:endParaRPr lang="en-US"/>
           </a:p>
         </p:txBody>
       </p:sp>
@@ -1864,7 +1864,7 @@
             <a:fld id="{1D8BD707-D9CF-40AE-B4C6-C98DA3205C09}" type="datetimeFigureOut">
               <a:rPr lang="en-US" smtClean="0"/>
               <a:pPr/>
-              <a:t>8/1/2011</a:t>
+              <a:t>4/10/2026</a:t>
             </a:fld>
             <a:endParaRPr lang="en-US"/>
           </a:p>
@@ -1956,7 +1956,7 @@
             <a:fld id="{1D8BD707-D9CF-40AE-B4C6-C98DA3205C09}" type="datetimeFigureOut">
               <a:rPr lang="en-US" smtClean="0"/>
               <a:pPr/>
-              <a:t>8/1/2011</a:t>
+              <a:t>4/10/2026</a:t>
             </a:fld>
             <a:endParaRPr lang="en-US"/>
           </a:p>
@@ -2055,10 +2055,9 @@
           </a:lstStyle>
           <a:p>
             <a:r>
-              <a:rPr lang="en-US" smtClean="0"/>
+              <a:rPr lang="en-US"/>
               <a:t>Click to edit Master title style</a:t>
             </a:r>
-            <a:endParaRPr lang="en-US"/>
           </a:p>
         </p:txBody>
       </p:sp>
@@ -2112,38 +2111,37 @@
           <a:p>
             <a:pPr lvl="0"/>
             <a:r>
-              <a:rPr lang="en-US" smtClean="0"/>
+              <a:rPr lang="en-US"/>
               <a:t>Click to edit Master text styles</a:t>
             </a:r>
           </a:p>
           <a:p>
             <a:pPr lvl="1"/>
             <a:r>
-              <a:rPr lang="en-US" smtClean="0"/>
+              <a:rPr lang="en-US"/>
               <a:t>Second level</a:t>
             </a:r>
           </a:p>
           <a:p>
             <a:pPr lvl="2"/>
             <a:r>
-              <a:rPr lang="en-US" smtClean="0"/>
+              <a:rPr lang="en-US"/>
               <a:t>Third level</a:t>
             </a:r>
           </a:p>
           <a:p>
             <a:pPr lvl="3"/>
             <a:r>
-              <a:rPr lang="en-US" smtClean="0"/>
+              <a:rPr lang="en-US"/>
               <a:t>Fourth level</a:t>
             </a:r>
           </a:p>
           <a:p>
             <a:pPr lvl="4"/>
             <a:r>
-              <a:rPr lang="en-US" smtClean="0"/>
+              <a:rPr lang="en-US"/>
               <a:t>Fifth level</a:t>
             </a:r>
-            <a:endParaRPr lang="en-US"/>
           </a:p>
         </p:txBody>
       </p:sp>
@@ -2206,7 +2204,7 @@
           <a:p>
             <a:pPr lvl="0"/>
             <a:r>
-              <a:rPr lang="en-US" smtClean="0"/>
+              <a:rPr lang="en-US"/>
               <a:t>Click to edit Master text styles</a:t>
             </a:r>
           </a:p>
@@ -2230,7 +2228,7 @@
             <a:fld id="{1D8BD707-D9CF-40AE-B4C6-C98DA3205C09}" type="datetimeFigureOut">
               <a:rPr lang="en-US" smtClean="0"/>
               <a:pPr/>
-              <a:t>8/1/2011</a:t>
+              <a:t>4/10/2026</a:t>
             </a:fld>
             <a:endParaRPr lang="en-US"/>
           </a:p>
@@ -2329,10 +2327,9 @@
           </a:lstStyle>
           <a:p>
             <a:r>
-              <a:rPr lang="en-US" smtClean="0"/>
+              <a:rPr lang="en-US"/>
               <a:t>Click to edit Master title style</a:t>
             </a:r>
-            <a:endParaRPr lang="en-US"/>
           </a:p>
         </p:txBody>
       </p:sp>
@@ -2456,7 +2453,7 @@
           <a:p>
             <a:pPr lvl="0"/>
             <a:r>
-              <a:rPr lang="en-US" smtClean="0"/>
+              <a:rPr lang="en-US"/>
               <a:t>Click to edit Master text styles</a:t>
             </a:r>
           </a:p>
@@ -2480,7 +2477,7 @@
             <a:fld id="{1D8BD707-D9CF-40AE-B4C6-C98DA3205C09}" type="datetimeFigureOut">
               <a:rPr lang="en-US" smtClean="0"/>
               <a:pPr/>
-              <a:t>8/1/2011</a:t>
+              <a:t>4/10/2026</a:t>
             </a:fld>
             <a:endParaRPr lang="en-US"/>
           </a:p>
@@ -2585,10 +2582,9 @@
           <a:lstStyle/>
           <a:p>
             <a:r>
-              <a:rPr lang="en-US" smtClean="0"/>
+              <a:rPr lang="en-US"/>
               <a:t>Click to edit Master title style</a:t>
             </a:r>
-            <a:endParaRPr lang="en-US"/>
           </a:p>
         </p:txBody>
       </p:sp>
@@ -2619,38 +2615,37 @@
           <a:p>
             <a:pPr lvl="0"/>
             <a:r>
-              <a:rPr lang="en-US" smtClean="0"/>
+              <a:rPr lang="en-US"/>
               <a:t>Click to edit Master text styles</a:t>
             </a:r>
           </a:p>
           <a:p>
             <a:pPr lvl="1"/>
             <a:r>
-              <a:rPr lang="en-US" smtClean="0"/>
+              <a:rPr lang="en-US"/>
               <a:t>Second level</a:t>
             </a:r>
           </a:p>
           <a:p>
             <a:pPr lvl="2"/>
             <a:r>
-              <a:rPr lang="en-US" smtClean="0"/>
+              <a:rPr lang="en-US"/>
               <a:t>Third level</a:t>
             </a:r>
           </a:p>
           <a:p>
             <a:pPr lvl="3"/>
             <a:r>
-              <a:rPr lang="en-US" smtClean="0"/>
+              <a:rPr lang="en-US"/>
               <a:t>Fourth level</a:t>
             </a:r>
           </a:p>
           <a:p>
             <a:pPr lvl="4"/>
             <a:r>
-              <a:rPr lang="en-US" smtClean="0"/>
+              <a:rPr lang="en-US"/>
               <a:t>Fifth level</a:t>
             </a:r>
-            <a:endParaRPr lang="en-US"/>
           </a:p>
         </p:txBody>
       </p:sp>
@@ -2690,7 +2685,7 @@
             <a:fld id="{1D8BD707-D9CF-40AE-B4C6-C98DA3205C09}" type="datetimeFigureOut">
               <a:rPr lang="en-US" smtClean="0"/>
               <a:pPr/>
-              <a:t>8/1/2011</a:t>
+              <a:t>4/10/2026</a:t>
             </a:fld>
             <a:endParaRPr lang="en-US"/>
           </a:p>
@@ -3045,7 +3040,7 @@
 </file>
 
 <file path=ppt/slides/slide1.xml><?xml version="1.0" encoding="utf-8"?>
-<p:sld xmlns:p="http://schemas.openxmlformats.org/presentationml/2006/main" xmlns:a="http://schemas.openxmlformats.org/drawingml/2006/main" xmlns:r="http://schemas.openxmlformats.org/officeDocument/2006/relationships">
+<p:sld xmlns:a="http://schemas.openxmlformats.org/drawingml/2006/main" xmlns:r="http://schemas.openxmlformats.org/officeDocument/2006/relationships" xmlns:p="http://schemas.openxmlformats.org/presentationml/2006/main">
   <p:cSld>
     <p:spTree>
       <p:nvGrpSpPr>
@@ -3063,12 +3058,12 @@
       </p:grpSpPr>
       <p:sp>
         <p:nvSpPr>
-          <p:cNvPr name="Freeform 2" id="2"/>
+          <p:cNvPr id="2" name="Freeform 2"/>
           <p:cNvSpPr/>
           <p:nvPr/>
         </p:nvSpPr>
         <p:spPr>
-          <a:xfrm flipH="false" flipV="false" rot="0">
+          <a:xfrm>
             <a:off x="0" y="0"/>
             <a:ext cx="18288000" cy="10287000"/>
           </a:xfrm>
@@ -3077,9 +3072,9 @@
             <a:gdLst/>
             <a:ahLst/>
             <a:cxnLst/>
-            <a:rect r="r" b="b" t="t" l="l"/>
+            <a:rect l="l" t="t" r="r" b="b"/>
             <a:pathLst>
-              <a:path h="10287000" w="18288000">
+              <a:path w="18288000" h="10287000">
                 <a:moveTo>
                   <a:pt x="0" y="0"/>
                 </a:moveTo>
@@ -3102,7 +3097,7 @@
           <a:blipFill>
             <a:blip r:embed="rId2"/>
             <a:stretch>
-              <a:fillRect l="-123" t="-247" r="-123" b="0"/>
+              <a:fillRect l="-123" t="-247" r="-123"/>
             </a:stretch>
           </a:blipFill>
         </p:spPr>
@@ -3116,7 +3111,7 @@
 </file>
 
 <file path=ppt/slides/slide2.xml><?xml version="1.0" encoding="utf-8"?>
-<p:sld xmlns:p="http://schemas.openxmlformats.org/presentationml/2006/main" xmlns:a="http://schemas.openxmlformats.org/drawingml/2006/main" xmlns:r="http://schemas.openxmlformats.org/officeDocument/2006/relationships">
+<p:sld xmlns:a="http://schemas.openxmlformats.org/drawingml/2006/main" xmlns:r="http://schemas.openxmlformats.org/officeDocument/2006/relationships" xmlns:p="http://schemas.openxmlformats.org/presentationml/2006/main">
   <p:cSld>
     <p:spTree>
       <p:nvGrpSpPr>
@@ -3134,23 +3129,23 @@
       </p:grpSpPr>
       <p:sp>
         <p:nvSpPr>
-          <p:cNvPr name="Freeform 2" id="2"/>
+          <p:cNvPr id="2" name="Freeform 2"/>
           <p:cNvSpPr/>
           <p:nvPr/>
         </p:nvSpPr>
         <p:spPr>
-          <a:xfrm flipH="false" flipV="false" rot="0">
-            <a:off x="0" y="66575"/>
-            <a:ext cx="18288000" cy="10220425"/>
+          <a:xfrm>
+            <a:off x="0" y="1"/>
+            <a:ext cx="18288000" cy="10287000"/>
           </a:xfrm>
           <a:custGeom>
             <a:avLst/>
             <a:gdLst/>
             <a:ahLst/>
             <a:cxnLst/>
-            <a:rect r="r" b="b" t="t" l="l"/>
+            <a:rect l="l" t="t" r="r" b="b"/>
             <a:pathLst>
-              <a:path h="10220425" w="18288000">
+              <a:path w="18288000" h="10220425">
                 <a:moveTo>
                   <a:pt x="0" y="0"/>
                 </a:moveTo>
@@ -3173,7 +3168,7 @@
           <a:blipFill>
             <a:blip r:embed="rId2"/>
             <a:stretch>
-              <a:fillRect l="0" t="-5917" r="0" b="-5917"/>
+              <a:fillRect t="-5917" b="-5917"/>
             </a:stretch>
           </a:blipFill>
         </p:spPr>
@@ -3187,7 +3182,7 @@
 </file>
 
 <file path=ppt/slides/slide3.xml><?xml version="1.0" encoding="utf-8"?>
-<p:sld xmlns:p="http://schemas.openxmlformats.org/presentationml/2006/main" xmlns:a="http://schemas.openxmlformats.org/drawingml/2006/main" xmlns:r="http://schemas.openxmlformats.org/officeDocument/2006/relationships">
+<p:sld xmlns:a="http://schemas.openxmlformats.org/drawingml/2006/main" xmlns:r="http://schemas.openxmlformats.org/officeDocument/2006/relationships" xmlns:p="http://schemas.openxmlformats.org/presentationml/2006/main">
   <p:cSld>
     <p:spTree>
       <p:nvGrpSpPr>
@@ -3205,12 +3200,12 @@
       </p:grpSpPr>
       <p:sp>
         <p:nvSpPr>
-          <p:cNvPr name="Freeform 2" id="2"/>
+          <p:cNvPr id="2" name="Freeform 2"/>
           <p:cNvSpPr/>
           <p:nvPr/>
         </p:nvSpPr>
         <p:spPr>
-          <a:xfrm flipH="false" flipV="false" rot="0">
+          <a:xfrm>
             <a:off x="0" y="0"/>
             <a:ext cx="18288000" cy="10287000"/>
           </a:xfrm>
@@ -3219,9 +3214,9 @@
             <a:gdLst/>
             <a:ahLst/>
             <a:cxnLst/>
-            <a:rect r="r" b="b" t="t" l="l"/>
+            <a:rect l="l" t="t" r="r" b="b"/>
             <a:pathLst>
-              <a:path h="10287000" w="18288000">
+              <a:path w="18288000" h="10287000">
                 <a:moveTo>
                   <a:pt x="0" y="0"/>
                 </a:moveTo>
@@ -3244,7 +3239,7 @@
           <a:blipFill>
             <a:blip r:embed="rId2"/>
             <a:stretch>
-              <a:fillRect l="0" t="-5555" r="0" b="-5555"/>
+              <a:fillRect t="-5555" b="-5555"/>
             </a:stretch>
           </a:blipFill>
         </p:spPr>
